--- a/assets/pptx/catalog-298.pptx
+++ b/assets/pptx/catalog-298.pptx
@@ -3299,7 +3299,7 @@
                 <a:ea typeface="Ebrima"/>
                 <a:cs typeface="Ebrima"/>
               </a:rPr>
-              <a:t>በርግጥ ሞተን ነበር በፀጋው አዳነን (2x)</a:t>
+              <a:t>በርግጥ ሞተን ነበር በፀጋው አዳነን 2x</a:t>
             </a:r>
           </a:p>
         </p:txBody>
@@ -3487,7 +3487,7 @@
                 <a:ea typeface="Ebrima"/>
                 <a:cs typeface="Ebrima"/>
               </a:rPr>
-              <a:t>ሞታችንን ሞቶ በህይወት አኖረን (2x)</a:t>
+              <a:t>ሞታችንን ሞቶ በህይወት አኖረን 2x</a:t>
             </a:r>
           </a:p>
         </p:txBody>
@@ -3675,7 +3675,7 @@
                 <a:ea typeface="Ebrima"/>
                 <a:cs typeface="Ebrima"/>
               </a:rPr>
-              <a:t>ማይጠፋውን ህይወት በነፃ አግኝተናል (2x)</a:t>
+              <a:t>ማይጠፋውን ህይወት በነፃ አግኝተናል 2x</a:t>
             </a:r>
           </a:p>
         </p:txBody>
